--- a/犧牲的愛.pptx
+++ b/犧牲的愛.pptx
@@ -166,7 +166,7 @@
           <a:lstStyle/>
           <a:p>
             <a:r>
-              <a:rPr lang="en-US" altLang="zh-TW" smtClean="0"/>
+              <a:rPr lang="en-US" altLang="zh-TW"/>
               <a:t>Click to edit Master title style</a:t>
             </a:r>
             <a:endParaRPr lang="zh-TW" altLang="en-US"/>
@@ -285,7 +285,7 @@
           </a:lstStyle>
           <a:p>
             <a:r>
-              <a:rPr lang="en-US" altLang="zh-TW" smtClean="0"/>
+              <a:rPr lang="en-US" altLang="zh-TW"/>
               <a:t>Click to edit Master subtitle style</a:t>
             </a:r>
             <a:endParaRPr lang="zh-TW" altLang="en-US"/>
@@ -309,7 +309,7 @@
           <a:p>
             <a:fld id="{9282428B-E0FF-44E0-A80A-27AE54E055F5}" type="datetimeFigureOut">
               <a:rPr lang="en-US" smtClean="0"/>
-              <a:t>2/19/2022</a:t>
+              <a:t>2/27/2026</a:t>
             </a:fld>
             <a:endParaRPr lang="en-US"/>
           </a:p>
@@ -398,7 +398,7 @@
           <a:lstStyle/>
           <a:p>
             <a:r>
-              <a:rPr lang="en-US" altLang="zh-TW" smtClean="0"/>
+              <a:rPr lang="en-US" altLang="zh-TW"/>
               <a:t>Click to edit Master title style</a:t>
             </a:r>
             <a:endParaRPr lang="zh-TW" altLang="en-US"/>
@@ -422,35 +422,35 @@
           <a:p>
             <a:pPr lvl="0"/>
             <a:r>
-              <a:rPr lang="en-US" altLang="zh-TW" smtClean="0"/>
+              <a:rPr lang="en-US" altLang="zh-TW"/>
               <a:t>Click to edit Master text styles</a:t>
             </a:r>
           </a:p>
           <a:p>
             <a:pPr lvl="1"/>
             <a:r>
-              <a:rPr lang="en-US" altLang="zh-TW" smtClean="0"/>
+              <a:rPr lang="en-US" altLang="zh-TW"/>
               <a:t>Second level</a:t>
             </a:r>
           </a:p>
           <a:p>
             <a:pPr lvl="2"/>
             <a:r>
-              <a:rPr lang="en-US" altLang="zh-TW" smtClean="0"/>
+              <a:rPr lang="en-US" altLang="zh-TW"/>
               <a:t>Third level</a:t>
             </a:r>
           </a:p>
           <a:p>
             <a:pPr lvl="3"/>
             <a:r>
-              <a:rPr lang="en-US" altLang="zh-TW" smtClean="0"/>
+              <a:rPr lang="en-US" altLang="zh-TW"/>
               <a:t>Fourth level</a:t>
             </a:r>
           </a:p>
           <a:p>
             <a:pPr lvl="4"/>
             <a:r>
-              <a:rPr lang="en-US" altLang="zh-TW" smtClean="0"/>
+              <a:rPr lang="en-US" altLang="zh-TW"/>
               <a:t>Fifth level</a:t>
             </a:r>
             <a:endParaRPr lang="zh-TW" altLang="en-US"/>
@@ -474,7 +474,7 @@
           <a:p>
             <a:fld id="{9282428B-E0FF-44E0-A80A-27AE54E055F5}" type="datetimeFigureOut">
               <a:rPr lang="en-US" smtClean="0"/>
-              <a:t>2/19/2022</a:t>
+              <a:t>2/27/2026</a:t>
             </a:fld>
             <a:endParaRPr lang="en-US"/>
           </a:p>
@@ -568,7 +568,7 @@
           <a:lstStyle/>
           <a:p>
             <a:r>
-              <a:rPr lang="en-US" altLang="zh-TW" smtClean="0"/>
+              <a:rPr lang="en-US" altLang="zh-TW"/>
               <a:t>Click to edit Master title style</a:t>
             </a:r>
             <a:endParaRPr lang="zh-TW" altLang="en-US"/>
@@ -597,35 +597,35 @@
           <a:p>
             <a:pPr lvl="0"/>
             <a:r>
-              <a:rPr lang="en-US" altLang="zh-TW" smtClean="0"/>
+              <a:rPr lang="en-US" altLang="zh-TW"/>
               <a:t>Click to edit Master text styles</a:t>
             </a:r>
           </a:p>
           <a:p>
             <a:pPr lvl="1"/>
             <a:r>
-              <a:rPr lang="en-US" altLang="zh-TW" smtClean="0"/>
+              <a:rPr lang="en-US" altLang="zh-TW"/>
               <a:t>Second level</a:t>
             </a:r>
           </a:p>
           <a:p>
             <a:pPr lvl="2"/>
             <a:r>
-              <a:rPr lang="en-US" altLang="zh-TW" smtClean="0"/>
+              <a:rPr lang="en-US" altLang="zh-TW"/>
               <a:t>Third level</a:t>
             </a:r>
           </a:p>
           <a:p>
             <a:pPr lvl="3"/>
             <a:r>
-              <a:rPr lang="en-US" altLang="zh-TW" smtClean="0"/>
+              <a:rPr lang="en-US" altLang="zh-TW"/>
               <a:t>Fourth level</a:t>
             </a:r>
           </a:p>
           <a:p>
             <a:pPr lvl="4"/>
             <a:r>
-              <a:rPr lang="en-US" altLang="zh-TW" smtClean="0"/>
+              <a:rPr lang="en-US" altLang="zh-TW"/>
               <a:t>Fifth level</a:t>
             </a:r>
             <a:endParaRPr lang="zh-TW" altLang="en-US"/>
@@ -649,7 +649,7 @@
           <a:p>
             <a:fld id="{9282428B-E0FF-44E0-A80A-27AE54E055F5}" type="datetimeFigureOut">
               <a:rPr lang="en-US" smtClean="0"/>
-              <a:t>2/19/2022</a:t>
+              <a:t>2/27/2026</a:t>
             </a:fld>
             <a:endParaRPr lang="en-US"/>
           </a:p>
@@ -738,7 +738,7 @@
           <a:lstStyle/>
           <a:p>
             <a:r>
-              <a:rPr lang="en-US" altLang="zh-TW" smtClean="0"/>
+              <a:rPr lang="en-US" altLang="zh-TW"/>
               <a:t>Click to edit Master title style</a:t>
             </a:r>
             <a:endParaRPr lang="zh-TW" altLang="en-US"/>
@@ -762,35 +762,35 @@
           <a:p>
             <a:pPr lvl="0"/>
             <a:r>
-              <a:rPr lang="en-US" altLang="zh-TW" smtClean="0"/>
+              <a:rPr lang="en-US" altLang="zh-TW"/>
               <a:t>Click to edit Master text styles</a:t>
             </a:r>
           </a:p>
           <a:p>
             <a:pPr lvl="1"/>
             <a:r>
-              <a:rPr lang="en-US" altLang="zh-TW" smtClean="0"/>
+              <a:rPr lang="en-US" altLang="zh-TW"/>
               <a:t>Second level</a:t>
             </a:r>
           </a:p>
           <a:p>
             <a:pPr lvl="2"/>
             <a:r>
-              <a:rPr lang="en-US" altLang="zh-TW" smtClean="0"/>
+              <a:rPr lang="en-US" altLang="zh-TW"/>
               <a:t>Third level</a:t>
             </a:r>
           </a:p>
           <a:p>
             <a:pPr lvl="3"/>
             <a:r>
-              <a:rPr lang="en-US" altLang="zh-TW" smtClean="0"/>
+              <a:rPr lang="en-US" altLang="zh-TW"/>
               <a:t>Fourth level</a:t>
             </a:r>
           </a:p>
           <a:p>
             <a:pPr lvl="4"/>
             <a:r>
-              <a:rPr lang="en-US" altLang="zh-TW" smtClean="0"/>
+              <a:rPr lang="en-US" altLang="zh-TW"/>
               <a:t>Fifth level</a:t>
             </a:r>
             <a:endParaRPr lang="zh-TW" altLang="en-US"/>
@@ -814,7 +814,7 @@
           <a:p>
             <a:fld id="{9282428B-E0FF-44E0-A80A-27AE54E055F5}" type="datetimeFigureOut">
               <a:rPr lang="en-US" smtClean="0"/>
-              <a:t>2/19/2022</a:t>
+              <a:t>2/27/2026</a:t>
             </a:fld>
             <a:endParaRPr lang="en-US"/>
           </a:p>
@@ -912,7 +912,7 @@
           </a:lstStyle>
           <a:p>
             <a:r>
-              <a:rPr lang="en-US" altLang="zh-TW" smtClean="0"/>
+              <a:rPr lang="en-US" altLang="zh-TW"/>
               <a:t>Click to edit Master title style</a:t>
             </a:r>
             <a:endParaRPr lang="zh-TW" altLang="en-US"/>
@@ -1032,7 +1032,7 @@
           <a:p>
             <a:pPr lvl="0"/>
             <a:r>
-              <a:rPr lang="en-US" altLang="zh-TW" smtClean="0"/>
+              <a:rPr lang="en-US" altLang="zh-TW"/>
               <a:t>Click to edit Master text styles</a:t>
             </a:r>
           </a:p>
@@ -1055,7 +1055,7 @@
           <a:p>
             <a:fld id="{9282428B-E0FF-44E0-A80A-27AE54E055F5}" type="datetimeFigureOut">
               <a:rPr lang="en-US" smtClean="0"/>
-              <a:t>2/19/2022</a:t>
+              <a:t>2/27/2026</a:t>
             </a:fld>
             <a:endParaRPr lang="en-US"/>
           </a:p>
@@ -1144,7 +1144,7 @@
           <a:lstStyle/>
           <a:p>
             <a:r>
-              <a:rPr lang="en-US" altLang="zh-TW" smtClean="0"/>
+              <a:rPr lang="en-US" altLang="zh-TW"/>
               <a:t>Click to edit Master title style</a:t>
             </a:r>
             <a:endParaRPr lang="zh-TW" altLang="en-US"/>
@@ -1201,35 +1201,35 @@
           <a:p>
             <a:pPr lvl="0"/>
             <a:r>
-              <a:rPr lang="en-US" altLang="zh-TW" smtClean="0"/>
+              <a:rPr lang="en-US" altLang="zh-TW"/>
               <a:t>Click to edit Master text styles</a:t>
             </a:r>
           </a:p>
           <a:p>
             <a:pPr lvl="1"/>
             <a:r>
-              <a:rPr lang="en-US" altLang="zh-TW" smtClean="0"/>
+              <a:rPr lang="en-US" altLang="zh-TW"/>
               <a:t>Second level</a:t>
             </a:r>
           </a:p>
           <a:p>
             <a:pPr lvl="2"/>
             <a:r>
-              <a:rPr lang="en-US" altLang="zh-TW" smtClean="0"/>
+              <a:rPr lang="en-US" altLang="zh-TW"/>
               <a:t>Third level</a:t>
             </a:r>
           </a:p>
           <a:p>
             <a:pPr lvl="3"/>
             <a:r>
-              <a:rPr lang="en-US" altLang="zh-TW" smtClean="0"/>
+              <a:rPr lang="en-US" altLang="zh-TW"/>
               <a:t>Fourth level</a:t>
             </a:r>
           </a:p>
           <a:p>
             <a:pPr lvl="4"/>
             <a:r>
-              <a:rPr lang="en-US" altLang="zh-TW" smtClean="0"/>
+              <a:rPr lang="en-US" altLang="zh-TW"/>
               <a:t>Fifth level</a:t>
             </a:r>
             <a:endParaRPr lang="zh-TW" altLang="en-US"/>
@@ -1286,35 +1286,35 @@
           <a:p>
             <a:pPr lvl="0"/>
             <a:r>
-              <a:rPr lang="en-US" altLang="zh-TW" smtClean="0"/>
+              <a:rPr lang="en-US" altLang="zh-TW"/>
               <a:t>Click to edit Master text styles</a:t>
             </a:r>
           </a:p>
           <a:p>
             <a:pPr lvl="1"/>
             <a:r>
-              <a:rPr lang="en-US" altLang="zh-TW" smtClean="0"/>
+              <a:rPr lang="en-US" altLang="zh-TW"/>
               <a:t>Second level</a:t>
             </a:r>
           </a:p>
           <a:p>
             <a:pPr lvl="2"/>
             <a:r>
-              <a:rPr lang="en-US" altLang="zh-TW" smtClean="0"/>
+              <a:rPr lang="en-US" altLang="zh-TW"/>
               <a:t>Third level</a:t>
             </a:r>
           </a:p>
           <a:p>
             <a:pPr lvl="3"/>
             <a:r>
-              <a:rPr lang="en-US" altLang="zh-TW" smtClean="0"/>
+              <a:rPr lang="en-US" altLang="zh-TW"/>
               <a:t>Fourth level</a:t>
             </a:r>
           </a:p>
           <a:p>
             <a:pPr lvl="4"/>
             <a:r>
-              <a:rPr lang="en-US" altLang="zh-TW" smtClean="0"/>
+              <a:rPr lang="en-US" altLang="zh-TW"/>
               <a:t>Fifth level</a:t>
             </a:r>
             <a:endParaRPr lang="zh-TW" altLang="en-US"/>
@@ -1338,7 +1338,7 @@
           <a:p>
             <a:fld id="{9282428B-E0FF-44E0-A80A-27AE54E055F5}" type="datetimeFigureOut">
               <a:rPr lang="en-US" smtClean="0"/>
-              <a:t>2/19/2022</a:t>
+              <a:t>2/27/2026</a:t>
             </a:fld>
             <a:endParaRPr lang="en-US"/>
           </a:p>
@@ -1431,7 +1431,7 @@
           </a:lstStyle>
           <a:p>
             <a:r>
-              <a:rPr lang="en-US" altLang="zh-TW" smtClean="0"/>
+              <a:rPr lang="en-US" altLang="zh-TW"/>
               <a:t>Click to edit Master title style</a:t>
             </a:r>
             <a:endParaRPr lang="zh-TW" altLang="en-US"/>
@@ -1497,7 +1497,7 @@
           <a:p>
             <a:pPr lvl="0"/>
             <a:r>
-              <a:rPr lang="en-US" altLang="zh-TW" smtClean="0"/>
+              <a:rPr lang="en-US" altLang="zh-TW"/>
               <a:t>Click to edit Master text styles</a:t>
             </a:r>
           </a:p>
@@ -1553,35 +1553,35 @@
           <a:p>
             <a:pPr lvl="0"/>
             <a:r>
-              <a:rPr lang="en-US" altLang="zh-TW" smtClean="0"/>
+              <a:rPr lang="en-US" altLang="zh-TW"/>
               <a:t>Click to edit Master text styles</a:t>
             </a:r>
           </a:p>
           <a:p>
             <a:pPr lvl="1"/>
             <a:r>
-              <a:rPr lang="en-US" altLang="zh-TW" smtClean="0"/>
+              <a:rPr lang="en-US" altLang="zh-TW"/>
               <a:t>Second level</a:t>
             </a:r>
           </a:p>
           <a:p>
             <a:pPr lvl="2"/>
             <a:r>
-              <a:rPr lang="en-US" altLang="zh-TW" smtClean="0"/>
+              <a:rPr lang="en-US" altLang="zh-TW"/>
               <a:t>Third level</a:t>
             </a:r>
           </a:p>
           <a:p>
             <a:pPr lvl="3"/>
             <a:r>
-              <a:rPr lang="en-US" altLang="zh-TW" smtClean="0"/>
+              <a:rPr lang="en-US" altLang="zh-TW"/>
               <a:t>Fourth level</a:t>
             </a:r>
           </a:p>
           <a:p>
             <a:pPr lvl="4"/>
             <a:r>
-              <a:rPr lang="en-US" altLang="zh-TW" smtClean="0"/>
+              <a:rPr lang="en-US" altLang="zh-TW"/>
               <a:t>Fifth level</a:t>
             </a:r>
             <a:endParaRPr lang="zh-TW" altLang="en-US"/>
@@ -1647,7 +1647,7 @@
           <a:p>
             <a:pPr lvl="0"/>
             <a:r>
-              <a:rPr lang="en-US" altLang="zh-TW" smtClean="0"/>
+              <a:rPr lang="en-US" altLang="zh-TW"/>
               <a:t>Click to edit Master text styles</a:t>
             </a:r>
           </a:p>
@@ -1703,35 +1703,35 @@
           <a:p>
             <a:pPr lvl="0"/>
             <a:r>
-              <a:rPr lang="en-US" altLang="zh-TW" smtClean="0"/>
+              <a:rPr lang="en-US" altLang="zh-TW"/>
               <a:t>Click to edit Master text styles</a:t>
             </a:r>
           </a:p>
           <a:p>
             <a:pPr lvl="1"/>
             <a:r>
-              <a:rPr lang="en-US" altLang="zh-TW" smtClean="0"/>
+              <a:rPr lang="en-US" altLang="zh-TW"/>
               <a:t>Second level</a:t>
             </a:r>
           </a:p>
           <a:p>
             <a:pPr lvl="2"/>
             <a:r>
-              <a:rPr lang="en-US" altLang="zh-TW" smtClean="0"/>
+              <a:rPr lang="en-US" altLang="zh-TW"/>
               <a:t>Third level</a:t>
             </a:r>
           </a:p>
           <a:p>
             <a:pPr lvl="3"/>
             <a:r>
-              <a:rPr lang="en-US" altLang="zh-TW" smtClean="0"/>
+              <a:rPr lang="en-US" altLang="zh-TW"/>
               <a:t>Fourth level</a:t>
             </a:r>
           </a:p>
           <a:p>
             <a:pPr lvl="4"/>
             <a:r>
-              <a:rPr lang="en-US" altLang="zh-TW" smtClean="0"/>
+              <a:rPr lang="en-US" altLang="zh-TW"/>
               <a:t>Fifth level</a:t>
             </a:r>
             <a:endParaRPr lang="zh-TW" altLang="en-US"/>
@@ -1755,7 +1755,7 @@
           <a:p>
             <a:fld id="{9282428B-E0FF-44E0-A80A-27AE54E055F5}" type="datetimeFigureOut">
               <a:rPr lang="en-US" smtClean="0"/>
-              <a:t>2/19/2022</a:t>
+              <a:t>2/27/2026</a:t>
             </a:fld>
             <a:endParaRPr lang="en-US"/>
           </a:p>
@@ -1844,7 +1844,7 @@
           <a:lstStyle/>
           <a:p>
             <a:r>
-              <a:rPr lang="en-US" altLang="zh-TW" smtClean="0"/>
+              <a:rPr lang="en-US" altLang="zh-TW"/>
               <a:t>Click to edit Master title style</a:t>
             </a:r>
             <a:endParaRPr lang="zh-TW" altLang="en-US"/>
@@ -1868,7 +1868,7 @@
           <a:p>
             <a:fld id="{9282428B-E0FF-44E0-A80A-27AE54E055F5}" type="datetimeFigureOut">
               <a:rPr lang="en-US" smtClean="0"/>
-              <a:t>2/19/2022</a:t>
+              <a:t>2/27/2026</a:t>
             </a:fld>
             <a:endParaRPr lang="en-US"/>
           </a:p>
@@ -1958,7 +1958,7 @@
           <a:p>
             <a:fld id="{9282428B-E0FF-44E0-A80A-27AE54E055F5}" type="datetimeFigureOut">
               <a:rPr lang="en-US" smtClean="0"/>
-              <a:t>2/19/2022</a:t>
+              <a:t>2/27/2026</a:t>
             </a:fld>
             <a:endParaRPr lang="en-US"/>
           </a:p>
@@ -2056,7 +2056,7 @@
           </a:lstStyle>
           <a:p>
             <a:r>
-              <a:rPr lang="en-US" altLang="zh-TW" smtClean="0"/>
+              <a:rPr lang="en-US" altLang="zh-TW"/>
               <a:t>Click to edit Master title style</a:t>
             </a:r>
             <a:endParaRPr lang="zh-TW" altLang="en-US"/>
@@ -2113,35 +2113,35 @@
           <a:p>
             <a:pPr lvl="0"/>
             <a:r>
-              <a:rPr lang="en-US" altLang="zh-TW" smtClean="0"/>
+              <a:rPr lang="en-US" altLang="zh-TW"/>
               <a:t>Click to edit Master text styles</a:t>
             </a:r>
           </a:p>
           <a:p>
             <a:pPr lvl="1"/>
             <a:r>
-              <a:rPr lang="en-US" altLang="zh-TW" smtClean="0"/>
+              <a:rPr lang="en-US" altLang="zh-TW"/>
               <a:t>Second level</a:t>
             </a:r>
           </a:p>
           <a:p>
             <a:pPr lvl="2"/>
             <a:r>
-              <a:rPr lang="en-US" altLang="zh-TW" smtClean="0"/>
+              <a:rPr lang="en-US" altLang="zh-TW"/>
               <a:t>Third level</a:t>
             </a:r>
           </a:p>
           <a:p>
             <a:pPr lvl="3"/>
             <a:r>
-              <a:rPr lang="en-US" altLang="zh-TW" smtClean="0"/>
+              <a:rPr lang="en-US" altLang="zh-TW"/>
               <a:t>Fourth level</a:t>
             </a:r>
           </a:p>
           <a:p>
             <a:pPr lvl="4"/>
             <a:r>
-              <a:rPr lang="en-US" altLang="zh-TW" smtClean="0"/>
+              <a:rPr lang="en-US" altLang="zh-TW"/>
               <a:t>Fifth level</a:t>
             </a:r>
             <a:endParaRPr lang="zh-TW" altLang="en-US"/>
@@ -2207,7 +2207,7 @@
           <a:p>
             <a:pPr lvl="0"/>
             <a:r>
-              <a:rPr lang="en-US" altLang="zh-TW" smtClean="0"/>
+              <a:rPr lang="en-US" altLang="zh-TW"/>
               <a:t>Click to edit Master text styles</a:t>
             </a:r>
           </a:p>
@@ -2230,7 +2230,7 @@
           <a:p>
             <a:fld id="{9282428B-E0FF-44E0-A80A-27AE54E055F5}" type="datetimeFigureOut">
               <a:rPr lang="en-US" smtClean="0"/>
-              <a:t>2/19/2022</a:t>
+              <a:t>2/27/2026</a:t>
             </a:fld>
             <a:endParaRPr lang="en-US"/>
           </a:p>
@@ -2328,7 +2328,7 @@
           </a:lstStyle>
           <a:p>
             <a:r>
-              <a:rPr lang="en-US" altLang="zh-TW" smtClean="0"/>
+              <a:rPr lang="en-US" altLang="zh-TW"/>
               <a:t>Click to edit Master title style</a:t>
             </a:r>
             <a:endParaRPr lang="zh-TW" altLang="en-US"/>
@@ -2393,7 +2393,7 @@
           </a:lstStyle>
           <a:p>
             <a:r>
-              <a:rPr lang="en-US" altLang="zh-TW" smtClean="0"/>
+              <a:rPr lang="en-US" altLang="zh-TW"/>
               <a:t>Click icon to add picture</a:t>
             </a:r>
             <a:endParaRPr lang="zh-TW" altLang="en-US"/>
@@ -2459,7 +2459,7 @@
           <a:p>
             <a:pPr lvl="0"/>
             <a:r>
-              <a:rPr lang="en-US" altLang="zh-TW" smtClean="0"/>
+              <a:rPr lang="en-US" altLang="zh-TW"/>
               <a:t>Click to edit Master text styles</a:t>
             </a:r>
           </a:p>
@@ -2482,7 +2482,7 @@
           <a:p>
             <a:fld id="{9282428B-E0FF-44E0-A80A-27AE54E055F5}" type="datetimeFigureOut">
               <a:rPr lang="en-US" smtClean="0"/>
-              <a:t>2/19/2022</a:t>
+              <a:t>2/27/2026</a:t>
             </a:fld>
             <a:endParaRPr lang="en-US"/>
           </a:p>
@@ -2591,10 +2591,9 @@
           <a:lstStyle/>
           <a:p>
             <a:r>
-              <a:rPr lang="zh-TW" altLang="en-US" smtClean="0"/>
+              <a:rPr lang="zh-TW" altLang="en-US"/>
               <a:t>按一下以編輯母片標題樣式</a:t>
             </a:r>
-            <a:endParaRPr lang="zh-TW" altLang="en-US"/>
           </a:p>
         </p:txBody>
       </p:sp>
@@ -2625,38 +2624,37 @@
           <a:p>
             <a:pPr lvl="0"/>
             <a:r>
-              <a:rPr lang="zh-TW" altLang="en-US" smtClean="0"/>
+              <a:rPr lang="zh-TW" altLang="en-US"/>
               <a:t>按一下以編輯母片文字樣式</a:t>
             </a:r>
           </a:p>
           <a:p>
             <a:pPr lvl="1"/>
             <a:r>
-              <a:rPr lang="zh-TW" altLang="en-US" smtClean="0"/>
+              <a:rPr lang="zh-TW" altLang="en-US"/>
               <a:t>第二層</a:t>
             </a:r>
           </a:p>
           <a:p>
             <a:pPr lvl="2"/>
             <a:r>
-              <a:rPr lang="zh-TW" altLang="en-US" smtClean="0"/>
+              <a:rPr lang="zh-TW" altLang="en-US"/>
               <a:t>第三層</a:t>
             </a:r>
           </a:p>
           <a:p>
             <a:pPr lvl="3"/>
             <a:r>
-              <a:rPr lang="zh-TW" altLang="en-US" smtClean="0"/>
+              <a:rPr lang="zh-TW" altLang="en-US"/>
               <a:t>第四層</a:t>
             </a:r>
           </a:p>
           <a:p>
             <a:pPr lvl="4"/>
             <a:r>
-              <a:rPr lang="zh-TW" altLang="en-US" smtClean="0"/>
+              <a:rPr lang="zh-TW" altLang="en-US"/>
               <a:t>第五層</a:t>
             </a:r>
-            <a:endParaRPr lang="zh-TW" altLang="en-US"/>
           </a:p>
         </p:txBody>
       </p:sp>
@@ -2695,7 +2693,7 @@
           <a:p>
             <a:fld id="{9282428B-E0FF-44E0-A80A-27AE54E055F5}" type="datetimeFigureOut">
               <a:rPr lang="en-US" smtClean="0"/>
-              <a:t>2/19/2022</a:t>
+              <a:t>2/27/2026</a:t>
             </a:fld>
             <a:endParaRPr lang="en-US"/>
           </a:p>
@@ -3077,7 +3075,7 @@
         </p:nvSpPr>
         <p:spPr>
           <a:xfrm>
-            <a:off x="0" y="2143135"/>
+            <a:off x="0" y="2038350"/>
             <a:ext cx="9144000" cy="857250"/>
           </a:xfrm>
         </p:spPr>
@@ -3088,7 +3086,7 @@
           <a:lstStyle/>
           <a:p>
             <a:r>
-              <a:rPr lang="zh-CN" altLang="en-US" sz="5400" b="1" i="1" dirty="0" smtClean="0">
+              <a:rPr lang="zh-CN" altLang="en-US" sz="5400" b="1" i="1" dirty="0">
                 <a:solidFill>
                   <a:srgbClr val="000066"/>
                 </a:solidFill>
@@ -3102,24 +3100,7 @@
                 <a:latin typeface="微軟正黑體" pitchFamily="34" charset="-120"/>
                 <a:ea typeface="微軟正黑體" pitchFamily="34" charset="-120"/>
               </a:rPr>
-              <a:t>犧</a:t>
-            </a:r>
-            <a:r>
-              <a:rPr lang="zh-CN" altLang="en-US" sz="5400" b="1" i="1" dirty="0">
-                <a:solidFill>
-                  <a:srgbClr val="000066"/>
-                </a:solidFill>
-                <a:effectLst>
-                  <a:outerShdw blurRad="38100" dist="38100" dir="2700000" algn="tl">
-                    <a:srgbClr val="000000">
-                      <a:alpha val="43137"/>
-                    </a:srgbClr>
-                  </a:outerShdw>
-                </a:effectLst>
-                <a:latin typeface="微軟正黑體" pitchFamily="34" charset="-120"/>
-                <a:ea typeface="微軟正黑體" pitchFamily="34" charset="-120"/>
-              </a:rPr>
-              <a:t>牲的愛</a:t>
+              <a:t>犧牲的愛</a:t>
             </a:r>
             <a:endParaRPr lang="zh-TW" altLang="en-US" sz="5400" b="1" i="1" dirty="0">
               <a:solidFill>
@@ -3194,7 +3175,7 @@
               <a:buNone/>
             </a:pPr>
             <a:r>
-              <a:rPr lang="zh-TW" altLang="en-US" sz="4800" b="1" dirty="0" smtClean="0">
+              <a:rPr lang="zh-TW" altLang="en-US" sz="4800" b="1" dirty="0">
                 <a:solidFill>
                   <a:srgbClr val="000066"/>
                 </a:solidFill>
@@ -3202,10 +3183,10 @@
                 <a:latin typeface="微軟正黑體" pitchFamily="34" charset="-120"/>
                 <a:ea typeface="微軟正黑體" pitchFamily="34" charset="-120"/>
               </a:rPr>
-              <a:t>在</a:t>
-            </a:r>
-            <a:r>
-              <a:rPr lang="zh-TW" altLang="en-US" sz="4800" b="1" dirty="0">
+              <a:t>在十字架上  </a:t>
+            </a:r>
+            <a:r>
+              <a:rPr lang="zh-CN" altLang="en-US" sz="4800" b="1" dirty="0">
                 <a:solidFill>
                   <a:srgbClr val="000066"/>
                 </a:solidFill>
@@ -3213,10 +3194,10 @@
                 <a:latin typeface="微軟正黑體" pitchFamily="34" charset="-120"/>
                 <a:ea typeface="微軟正黑體" pitchFamily="34" charset="-120"/>
               </a:rPr>
-              <a:t>十字架上  </a:t>
-            </a:r>
-            <a:r>
-              <a:rPr lang="zh-CN" altLang="en-US" sz="4800" b="1" dirty="0" smtClean="0">
+              <a:t>祢</a:t>
+            </a:r>
+            <a:r>
+              <a:rPr lang="zh-TW" altLang="en-US" sz="4800" b="1" dirty="0">
                 <a:solidFill>
                   <a:srgbClr val="000066"/>
                 </a:solidFill>
@@ -3224,29 +3205,7 @@
                 <a:latin typeface="微軟正黑體" pitchFamily="34" charset="-120"/>
                 <a:ea typeface="微軟正黑體" pitchFamily="34" charset="-120"/>
               </a:rPr>
-              <a:t>袮</a:t>
-            </a:r>
-            <a:r>
-              <a:rPr lang="zh-TW" altLang="en-US" sz="4800" b="1" dirty="0" smtClean="0">
-                <a:solidFill>
-                  <a:srgbClr val="000066"/>
-                </a:solidFill>
-                <a:effectLst/>
-                <a:latin typeface="微軟正黑體" pitchFamily="34" charset="-120"/>
-                <a:ea typeface="微軟正黑體" pitchFamily="34" charset="-120"/>
-              </a:rPr>
-              <a:t>為</a:t>
-            </a:r>
-            <a:r>
-              <a:rPr lang="zh-TW" altLang="en-US" sz="4800" b="1" dirty="0">
-                <a:solidFill>
-                  <a:srgbClr val="000066"/>
-                </a:solidFill>
-                <a:effectLst/>
-                <a:latin typeface="微軟正黑體" pitchFamily="34" charset="-120"/>
-                <a:ea typeface="微軟正黑體" pitchFamily="34" charset="-120"/>
-              </a:rPr>
-              <a:t>我捨命</a:t>
+              <a:t>為我捨命</a:t>
             </a:r>
             <a:endParaRPr lang="en-US" altLang="zh-TW" sz="4800" b="1" dirty="0">
               <a:solidFill>
@@ -3318,7 +3277,7 @@
               <a:t>( </a:t>
             </a:r>
             <a:r>
-              <a:rPr lang="zh-CN" altLang="en-US" sz="3600" b="1" dirty="0" smtClean="0">
+              <a:rPr lang="zh-CN" altLang="en-US" sz="3600" b="1" dirty="0">
                 <a:solidFill>
                   <a:srgbClr val="000066"/>
                 </a:solidFill>
@@ -3326,10 +3285,10 @@
                 <a:latin typeface="Microsoft JhengHei" panose="020B0604030504040204" pitchFamily="34" charset="-120"/>
                 <a:ea typeface="Microsoft JhengHei" panose="020B0604030504040204" pitchFamily="34" charset="-120"/>
               </a:rPr>
-              <a:t>正 </a:t>
-            </a:r>
-            <a:r>
-              <a:rPr lang="en-US" sz="3600" b="1" dirty="0" smtClean="0">
+              <a:t>正歌 </a:t>
+            </a:r>
+            <a:r>
+              <a:rPr lang="en-US" sz="3600" b="1" dirty="0">
                 <a:solidFill>
                   <a:srgbClr val="000066"/>
                 </a:solidFill>
@@ -3413,10 +3372,20 @@
                 <a:latin typeface="微軟正黑體" pitchFamily="34" charset="-120"/>
                 <a:ea typeface="微軟正黑體" pitchFamily="34" charset="-120"/>
               </a:rPr>
-              <a:t>所有的罪</a:t>
-            </a:r>
-            <a:r>
-              <a:rPr lang="zh-TW" altLang="en-US" sz="4800" b="1" dirty="0" smtClean="0">
+              <a:t>所有的罪惡   </a:t>
+            </a:r>
+            <a:r>
+              <a:rPr lang="zh-CN" altLang="en-US" sz="4800" b="1" dirty="0">
+                <a:solidFill>
+                  <a:srgbClr val="000066"/>
+                </a:solidFill>
+                <a:latin typeface="微軟正黑體" pitchFamily="34" charset="-120"/>
+                <a:ea typeface="微軟正黑體" pitchFamily="34" charset="-120"/>
+              </a:rPr>
+              <a:t>祢</a:t>
+            </a:r>
+            <a:r>
+              <a:rPr lang="zh-TW" altLang="en-US" sz="4800" b="1" dirty="0">
                 <a:solidFill>
                   <a:srgbClr val="000066"/>
                 </a:solidFill>
@@ -3424,39 +3393,7 @@
                 <a:latin typeface="微軟正黑體" pitchFamily="34" charset="-120"/>
                 <a:ea typeface="微軟正黑體" pitchFamily="34" charset="-120"/>
               </a:rPr>
-              <a:t>惡   </a:t>
-            </a:r>
-            <a:r>
-              <a:rPr lang="zh-CN" altLang="en-US" sz="4800" b="1" dirty="0" smtClean="0">
-                <a:solidFill>
-                  <a:srgbClr val="000066"/>
-                </a:solidFill>
-                <a:latin typeface="微軟正黑體" pitchFamily="34" charset="-120"/>
-                <a:ea typeface="微軟正黑體" pitchFamily="34" charset="-120"/>
-              </a:rPr>
-              <a:t>袮</a:t>
-            </a:r>
-            <a:r>
-              <a:rPr lang="zh-TW" altLang="en-US" sz="4800" b="1" dirty="0" smtClean="0">
-                <a:solidFill>
-                  <a:srgbClr val="000066"/>
-                </a:solidFill>
-                <a:effectLst/>
-                <a:latin typeface="微軟正黑體" pitchFamily="34" charset="-120"/>
-                <a:ea typeface="微軟正黑體" pitchFamily="34" charset="-120"/>
-              </a:rPr>
-              <a:t>為</a:t>
-            </a:r>
-            <a:r>
-              <a:rPr lang="zh-TW" altLang="en-US" sz="4800" b="1" dirty="0">
-                <a:solidFill>
-                  <a:srgbClr val="000066"/>
-                </a:solidFill>
-                <a:effectLst/>
-                <a:latin typeface="微軟正黑體" pitchFamily="34" charset="-120"/>
-                <a:ea typeface="微軟正黑體" pitchFamily="34" charset="-120"/>
-              </a:rPr>
-              <a:t>我擔當</a:t>
+              <a:t>為我擔當</a:t>
             </a:r>
             <a:endParaRPr lang="en-US" altLang="zh-TW" sz="4800" b="1" dirty="0">
               <a:solidFill>
@@ -3521,29 +3458,26 @@
                 <a:solidFill>
                   <a:srgbClr val="000066"/>
                 </a:solidFill>
-                <a:effectLst/>
                 <a:latin typeface="Microsoft JhengHei" panose="020B0604030504040204" pitchFamily="34" charset="-120"/>
                 <a:ea typeface="Microsoft JhengHei" panose="020B0604030504040204" pitchFamily="34" charset="-120"/>
               </a:rPr>
               <a:t>( </a:t>
             </a:r>
             <a:r>
-              <a:rPr lang="zh-CN" altLang="en-US" sz="3600" b="1" dirty="0" smtClean="0">
+              <a:rPr lang="zh-CN" altLang="en-US" sz="3600" b="1" dirty="0">
                 <a:solidFill>
                   <a:srgbClr val="000066"/>
                 </a:solidFill>
-                <a:effectLst/>
                 <a:latin typeface="Microsoft JhengHei" panose="020B0604030504040204" pitchFamily="34" charset="-120"/>
                 <a:ea typeface="Microsoft JhengHei" panose="020B0604030504040204" pitchFamily="34" charset="-120"/>
               </a:rPr>
-              <a:t>正 </a:t>
-            </a:r>
-            <a:r>
-              <a:rPr lang="en-US" sz="3600" b="1" dirty="0" smtClean="0">
+              <a:t>正歌 </a:t>
+            </a:r>
+            <a:r>
+              <a:rPr lang="en-US" sz="3600" b="1" dirty="0">
                 <a:solidFill>
                   <a:srgbClr val="000066"/>
                 </a:solidFill>
-                <a:effectLst/>
                 <a:latin typeface="Microsoft JhengHei" panose="020B0604030504040204" pitchFamily="34" charset="-120"/>
                 <a:ea typeface="Microsoft JhengHei" panose="020B0604030504040204" pitchFamily="34" charset="-120"/>
               </a:rPr>
@@ -3553,7 +3487,6 @@
               <a:solidFill>
                 <a:srgbClr val="000066"/>
               </a:solidFill>
-              <a:effectLst/>
               <a:ea typeface="Microsoft JhengHei" panose="020B0604030504040204" pitchFamily="34" charset="-120"/>
             </a:endParaRPr>
           </a:p>
@@ -3695,7 +3628,7 @@
               <a:t>( </a:t>
             </a:r>
             <a:r>
-              <a:rPr lang="zh-CN" altLang="en-US" sz="3600" b="1" dirty="0" smtClean="0">
+              <a:rPr lang="zh-CN" altLang="en-US" sz="3600" b="1" dirty="0">
                 <a:solidFill>
                   <a:srgbClr val="000066"/>
                 </a:solidFill>
@@ -3703,10 +3636,10 @@
                 <a:latin typeface="Microsoft JhengHei" panose="020B0604030504040204" pitchFamily="34" charset="-120"/>
                 <a:ea typeface="Microsoft JhengHei" panose="020B0604030504040204" pitchFamily="34" charset="-120"/>
               </a:rPr>
-              <a:t>副 </a:t>
-            </a:r>
-            <a:r>
-              <a:rPr lang="en-US" sz="3600" b="1" dirty="0" smtClean="0">
+              <a:t>副歌 </a:t>
+            </a:r>
+            <a:r>
+              <a:rPr lang="en-US" sz="3600" b="1" dirty="0">
                 <a:solidFill>
                   <a:srgbClr val="000066"/>
                 </a:solidFill>
@@ -3814,10 +3747,20 @@
                 <a:latin typeface="微軟正黑體" pitchFamily="34" charset="-120"/>
                 <a:ea typeface="微軟正黑體" pitchFamily="34" charset="-120"/>
               </a:rPr>
-              <a:t>今我</a:t>
-            </a:r>
-            <a:r>
-              <a:rPr lang="zh-TW" altLang="en-US" sz="4800" b="1" dirty="0" smtClean="0">
+              <a:t>今我屬</a:t>
+            </a:r>
+            <a:r>
+              <a:rPr lang="zh-CN" altLang="en-US" sz="4800" b="1" dirty="0">
+                <a:solidFill>
+                  <a:srgbClr val="000066"/>
+                </a:solidFill>
+                <a:latin typeface="微軟正黑體" pitchFamily="34" charset="-120"/>
+                <a:ea typeface="微軟正黑體" pitchFamily="34" charset="-120"/>
+              </a:rPr>
+              <a:t>祢   </a:t>
+            </a:r>
+            <a:r>
+              <a:rPr lang="zh-TW" altLang="en-US" sz="4800" b="1" dirty="0">
                 <a:solidFill>
                   <a:srgbClr val="000066"/>
                 </a:solidFill>
@@ -3825,39 +3768,7 @@
                 <a:latin typeface="微軟正黑體" pitchFamily="34" charset="-120"/>
                 <a:ea typeface="微軟正黑體" pitchFamily="34" charset="-120"/>
               </a:rPr>
-              <a:t>屬</a:t>
-            </a:r>
-            <a:r>
-              <a:rPr lang="zh-CN" altLang="en-US" sz="4800" b="1" dirty="0" smtClean="0">
-                <a:solidFill>
-                  <a:srgbClr val="000066"/>
-                </a:solidFill>
-                <a:latin typeface="微軟正黑體" pitchFamily="34" charset="-120"/>
-                <a:ea typeface="微軟正黑體" pitchFamily="34" charset="-120"/>
-              </a:rPr>
-              <a:t>袮   </a:t>
-            </a:r>
-            <a:r>
-              <a:rPr lang="zh-TW" altLang="en-US" sz="4800" b="1" dirty="0" smtClean="0">
-                <a:solidFill>
-                  <a:srgbClr val="000066"/>
-                </a:solidFill>
-                <a:effectLst/>
-                <a:latin typeface="微軟正黑體" pitchFamily="34" charset="-120"/>
-                <a:ea typeface="微軟正黑體" pitchFamily="34" charset="-120"/>
-              </a:rPr>
-              <a:t>永</a:t>
-            </a:r>
-            <a:r>
-              <a:rPr lang="zh-TW" altLang="en-US" sz="4800" b="1" dirty="0">
-                <a:solidFill>
-                  <a:srgbClr val="000066"/>
-                </a:solidFill>
-                <a:effectLst/>
-                <a:latin typeface="微軟正黑體" pitchFamily="34" charset="-120"/>
-                <a:ea typeface="微軟正黑體" pitchFamily="34" charset="-120"/>
-              </a:rPr>
-              <a:t>活的真神</a:t>
+              <a:t>永活的真神</a:t>
             </a:r>
             <a:endParaRPr lang="en-US" sz="4800" b="1" dirty="0">
               <a:solidFill>
@@ -3898,29 +3809,26 @@
                 <a:solidFill>
                   <a:srgbClr val="000066"/>
                 </a:solidFill>
-                <a:effectLst/>
                 <a:latin typeface="Microsoft JhengHei" panose="020B0604030504040204" pitchFamily="34" charset="-120"/>
                 <a:ea typeface="Microsoft JhengHei" panose="020B0604030504040204" pitchFamily="34" charset="-120"/>
               </a:rPr>
               <a:t>( </a:t>
             </a:r>
             <a:r>
-              <a:rPr lang="zh-CN" altLang="en-US" sz="3600" b="1" dirty="0" smtClean="0">
+              <a:rPr lang="zh-CN" altLang="en-US" sz="3600" b="1" dirty="0">
                 <a:solidFill>
                   <a:srgbClr val="000066"/>
                 </a:solidFill>
-                <a:effectLst/>
                 <a:latin typeface="Microsoft JhengHei" panose="020B0604030504040204" pitchFamily="34" charset="-120"/>
                 <a:ea typeface="Microsoft JhengHei" panose="020B0604030504040204" pitchFamily="34" charset="-120"/>
               </a:rPr>
-              <a:t>副 </a:t>
-            </a:r>
-            <a:r>
-              <a:rPr lang="en-US" sz="3600" b="1" dirty="0" smtClean="0">
+              <a:t>副歌 </a:t>
+            </a:r>
+            <a:r>
+              <a:rPr lang="en-US" sz="3600" b="1" dirty="0">
                 <a:solidFill>
                   <a:srgbClr val="000066"/>
                 </a:solidFill>
-                <a:effectLst/>
                 <a:latin typeface="Microsoft JhengHei" panose="020B0604030504040204" pitchFamily="34" charset="-120"/>
                 <a:ea typeface="Microsoft JhengHei" panose="020B0604030504040204" pitchFamily="34" charset="-120"/>
               </a:rPr>
@@ -3930,7 +3838,6 @@
               <a:solidFill>
                 <a:srgbClr val="000066"/>
               </a:solidFill>
-              <a:effectLst/>
               <a:ea typeface="Microsoft JhengHei" panose="020B0604030504040204" pitchFamily="34" charset="-120"/>
             </a:endParaRPr>
           </a:p>
@@ -4000,28 +3907,17 @@
                 <a:latin typeface="微軟正黑體" pitchFamily="34" charset="-120"/>
                 <a:ea typeface="微軟正黑體" pitchFamily="34" charset="-120"/>
               </a:rPr>
-              <a:t>在這個時刻   我心只</a:t>
-            </a:r>
-            <a:r>
-              <a:rPr lang="zh-TW" altLang="en-US" sz="4800" b="1" dirty="0" smtClean="0">
+              <a:t>在這個時刻   我心只有</a:t>
+            </a:r>
+            <a:r>
+              <a:rPr lang="zh-CN" altLang="en-US" sz="4800" b="1" dirty="0">
                 <a:solidFill>
                   <a:srgbClr val="000066"/>
                 </a:solidFill>
-                <a:effectLst/>
                 <a:latin typeface="微軟正黑體" pitchFamily="34" charset="-120"/>
                 <a:ea typeface="微軟正黑體" pitchFamily="34" charset="-120"/>
               </a:rPr>
-              <a:t>有</a:t>
-            </a:r>
-            <a:r>
-              <a:rPr lang="zh-CN" altLang="en-US" sz="4800" b="1" dirty="0">
-                <a:solidFill>
-                  <a:srgbClr val="000066"/>
-                </a:solidFill>
-                <a:latin typeface="微軟正黑體" pitchFamily="34" charset="-120"/>
-                <a:ea typeface="微軟正黑體" pitchFamily="34" charset="-120"/>
-              </a:rPr>
-              <a:t>袮</a:t>
+              <a:t>祢</a:t>
             </a:r>
             <a:endParaRPr lang="en-US" altLang="zh-TW" sz="4800" b="1" dirty="0">
               <a:solidFill>
@@ -4085,7 +3981,7 @@
               <a:t>( </a:t>
             </a:r>
             <a:r>
-              <a:rPr lang="zh-CN" altLang="en-US" sz="3600" b="1" dirty="0" smtClean="0">
+              <a:rPr lang="zh-CN" altLang="en-US" sz="3600" b="1">
                 <a:solidFill>
                   <a:srgbClr val="000066"/>
                 </a:solidFill>
@@ -4093,10 +3989,10 @@
                 <a:latin typeface="Microsoft JhengHei" panose="020B0604030504040204" pitchFamily="34" charset="-120"/>
                 <a:ea typeface="Microsoft JhengHei" panose="020B0604030504040204" pitchFamily="34" charset="-120"/>
               </a:rPr>
-              <a:t>尾 </a:t>
-            </a:r>
-            <a:r>
-              <a:rPr lang="en-US" sz="3600" b="1" dirty="0" smtClean="0">
+              <a:t>結尾 </a:t>
+            </a:r>
+            <a:r>
+              <a:rPr lang="en-US" sz="3600" b="1" dirty="0">
                 <a:solidFill>
                   <a:srgbClr val="000066"/>
                 </a:solidFill>
